--- a/presentation/1С_Кабинет_сотрудника_Преддемонстрация.pptx
+++ b/presentation/1С_Кабинет_сотрудника_Преддемонстрация.pptx
@@ -26,6 +26,8 @@
     <p:sldId id="268" r:id="rId20"/>
     <p:sldId id="269" r:id="rId21"/>
     <p:sldId id="270" r:id="rId22"/>
+    <p:sldId id="271" r:id="rId23"/>
+    <p:sldId id="272" r:id="rId24"/>
   </p:sldIdLst>
   <p:sldSz cx="12192000" cy="6858000"/>
   <p:notesSz cx="6858000" cy="9144000"/>
@@ -6446,7 +6448,7 @@
       </p:sp>
       <p:pic>
         <p:nvPicPr>
-          <p:cNvPr id="4" name="Picture 3" descr="devices_full.png"/>
+          <p:cNvPr id="4" name="Picture 3" descr="devices_laptop_phone.png"/>
           <p:cNvPicPr>
             <a:picLocks noChangeAspect="1"/>
           </p:cNvPicPr>
@@ -10595,7 +10597,7 @@
                 <a:ea typeface="Verdana"/>
                 <a:cs typeface="Verdana"/>
               </a:rPr>
-              <a:t>Что покажем на демонстрации</a:t>
+              <a:t>Сервис глазами сотрудника</a:t>
             </a:r>
           </a:p>
         </p:txBody>
@@ -10649,7 +10651,7 @@
                 <a:ea typeface="Verdana"/>
                 <a:cs typeface="Verdana"/>
               </a:rPr>
-              <a:t>Предлагаем посмотреть сервис на ваших процессах</a:t>
+              <a:t>Покажите клиенту экраны мобильного приложения до демо</a:t>
             </a:r>
           </a:p>
         </p:txBody>
@@ -10662,12 +10664,12 @@
         </p:nvSpPr>
         <p:spPr>
           <a:xfrm>
-            <a:off x="886968" y="1691640"/>
-            <a:ext cx="5212080" cy="914400"/>
+            <a:off x="502920" y="1554480"/>
+            <a:ext cx="2743200" cy="4572000"/>
           </a:xfrm>
           <a:prstGeom prst="roundRect">
             <a:avLst>
-              <a:gd name="adj" fmla="val 10000"/>
+              <a:gd name="adj" fmla="val 8000"/>
             </a:avLst>
           </a:prstGeom>
           <a:solidFill>
@@ -10701,7 +10703,7 @@
       </p:sp>
       <p:pic>
         <p:nvPicPr>
-          <p:cNvPr id="6" name="Picture 5" descr="icon_55.png"/>
+          <p:cNvPr id="6" name="Picture 5" descr="mobile_home_salary.png"/>
           <p:cNvPicPr>
             <a:picLocks noChangeAspect="1"/>
           </p:cNvPicPr>
@@ -10715,8 +10717,8 @@
         </p:blipFill>
         <p:spPr>
           <a:xfrm>
-            <a:off x="1069848" y="1874520"/>
-            <a:ext cx="502920" cy="502920"/>
+            <a:off x="731520" y="1737360"/>
+            <a:ext cx="1796277" cy="3520440"/>
           </a:xfrm>
           <a:prstGeom prst="rect">
             <a:avLst/>
@@ -10731,8 +10733,8 @@
         </p:nvSpPr>
         <p:spPr>
           <a:xfrm>
-            <a:off x="1755648" y="1920240"/>
-            <a:ext cx="4114800" cy="457200"/>
+            <a:off x="594360" y="5349240"/>
+            <a:ext cx="2560320" cy="640080"/>
           </a:xfrm>
           <a:prstGeom prst="rect">
             <a:avLst/>
@@ -10740,14 +10742,14 @@
           <a:noFill/>
         </p:spPr>
         <p:txBody>
-          <a:bodyPr wrap="square" anchor="ctr">
+          <a:bodyPr wrap="square" anchor="t">
             <a:spAutoFit/>
           </a:bodyPr>
           <a:lstStyle/>
           <a:p>
-            <a:pPr algn="l"/>
-            <a:r>
-              <a:rPr sz="1400" b="1">
+            <a:pPr algn="ctr"/>
+            <a:r>
+              <a:rPr sz="1100" b="1">
                 <a:solidFill>
                   <a:srgbClr val="FFFFFF"/>
                 </a:solidFill>
@@ -10755,7 +10757,8 @@
                 <a:ea typeface="Verdana"/>
                 <a:cs typeface="Verdana"/>
               </a:rPr>
-              <a:t>Оформление отпуска</a:t>
+              <a:t>Главный экран:
+зарплата и отсутствия</a:t>
             </a:r>
           </a:p>
         </p:txBody>
@@ -10768,12 +10771,12 @@
         </p:nvSpPr>
         <p:spPr>
           <a:xfrm>
-            <a:off x="6327648" y="1691640"/>
-            <a:ext cx="5212080" cy="914400"/>
+            <a:off x="3429000" y="1554480"/>
+            <a:ext cx="2743200" cy="4572000"/>
           </a:xfrm>
           <a:prstGeom prst="roundRect">
             <a:avLst>
-              <a:gd name="adj" fmla="val 10000"/>
+              <a:gd name="adj" fmla="val 8000"/>
             </a:avLst>
           </a:prstGeom>
           <a:solidFill>
@@ -10807,7 +10810,7 @@
       </p:sp>
       <p:pic>
         <p:nvPicPr>
-          <p:cNvPr id="9" name="Picture 8" descr="icon_22.png"/>
+          <p:cNvPr id="9" name="Picture 8" descr="mobile_vacation_request.png"/>
           <p:cNvPicPr>
             <a:picLocks noChangeAspect="1"/>
           </p:cNvPicPr>
@@ -10821,8 +10824,8 @@
         </p:blipFill>
         <p:spPr>
           <a:xfrm>
-            <a:off x="6510528" y="1874520"/>
-            <a:ext cx="502920" cy="502920"/>
+            <a:off x="3657600" y="1737360"/>
+            <a:ext cx="2150869" cy="3520440"/>
           </a:xfrm>
           <a:prstGeom prst="rect">
             <a:avLst/>
@@ -10837,8 +10840,8 @@
         </p:nvSpPr>
         <p:spPr>
           <a:xfrm>
-            <a:off x="7196328" y="1920240"/>
-            <a:ext cx="4114800" cy="457200"/>
+            <a:off x="3520440" y="5349240"/>
+            <a:ext cx="2560320" cy="640080"/>
           </a:xfrm>
           <a:prstGeom prst="rect">
             <a:avLst/>
@@ -10846,14 +10849,14 @@
           <a:noFill/>
         </p:spPr>
         <p:txBody>
-          <a:bodyPr wrap="square" anchor="ctr">
+          <a:bodyPr wrap="square" anchor="t">
             <a:spAutoFit/>
           </a:bodyPr>
           <a:lstStyle/>
           <a:p>
-            <a:pPr algn="l"/>
-            <a:r>
-              <a:rPr sz="1400" b="1">
+            <a:pPr algn="ctr"/>
+            <a:r>
+              <a:rPr sz="1100" b="1">
                 <a:solidFill>
                   <a:srgbClr val="FFFFFF"/>
                 </a:solidFill>
@@ -10861,7 +10864,8 @@
                 <a:ea typeface="Verdana"/>
                 <a:cs typeface="Verdana"/>
               </a:rPr>
-              <a:t>Отправка расчётного листка</a:t>
+              <a:t>Заявление
+на отпуск</a:t>
             </a:r>
           </a:p>
         </p:txBody>
@@ -10874,12 +10878,12 @@
         </p:nvSpPr>
         <p:spPr>
           <a:xfrm>
-            <a:off x="886968" y="2743200"/>
-            <a:ext cx="5212080" cy="914400"/>
+            <a:off x="6355080" y="1554480"/>
+            <a:ext cx="2743200" cy="4572000"/>
           </a:xfrm>
           <a:prstGeom prst="roundRect">
             <a:avLst>
-              <a:gd name="adj" fmla="val 10000"/>
+              <a:gd name="adj" fmla="val 8000"/>
             </a:avLst>
           </a:prstGeom>
           <a:solidFill>
@@ -10913,7 +10917,7 @@
       </p:sp>
       <p:pic>
         <p:nvPicPr>
-          <p:cNvPr id="12" name="Picture 11" descr="icon_69.png"/>
+          <p:cNvPr id="12" name="Picture 11" descr="mobile_vacation_wishes.png"/>
           <p:cNvPicPr>
             <a:picLocks noChangeAspect="1"/>
           </p:cNvPicPr>
@@ -10927,8 +10931,8 @@
         </p:blipFill>
         <p:spPr>
           <a:xfrm>
-            <a:off x="1069848" y="2926080"/>
-            <a:ext cx="502920" cy="502920"/>
+            <a:off x="6583680" y="1737360"/>
+            <a:ext cx="2935865" cy="3520440"/>
           </a:xfrm>
           <a:prstGeom prst="rect">
             <a:avLst/>
@@ -10943,8 +10947,8 @@
         </p:nvSpPr>
         <p:spPr>
           <a:xfrm>
-            <a:off x="1755648" y="2971800"/>
-            <a:ext cx="4114800" cy="457200"/>
+            <a:off x="6446520" y="5349240"/>
+            <a:ext cx="2560320" cy="640080"/>
           </a:xfrm>
           <a:prstGeom prst="rect">
             <a:avLst/>
@@ -10952,14 +10956,14 @@
           <a:noFill/>
         </p:spPr>
         <p:txBody>
-          <a:bodyPr wrap="square" anchor="ctr">
+          <a:bodyPr wrap="square" anchor="t">
             <a:spAutoFit/>
           </a:bodyPr>
           <a:lstStyle/>
           <a:p>
-            <a:pPr algn="l"/>
-            <a:r>
-              <a:rPr sz="1400" b="1">
+            <a:pPr algn="ctr"/>
+            <a:r>
+              <a:rPr sz="1100" b="1">
                 <a:solidFill>
                   <a:srgbClr val="FFFFFF"/>
                 </a:solidFill>
@@ -10967,7 +10971,8 @@
                 <a:ea typeface="Verdana"/>
                 <a:cs typeface="Verdana"/>
               </a:rPr>
-              <a:t>Согласование руководителем</a:t>
+              <a:t>Пожелания
+к графику отпусков</a:t>
             </a:r>
           </a:p>
         </p:txBody>
@@ -10980,12 +10985,12 @@
         </p:nvSpPr>
         <p:spPr>
           <a:xfrm>
-            <a:off x="6327648" y="2743200"/>
-            <a:ext cx="5212080" cy="914400"/>
+            <a:off x="9281160" y="1554480"/>
+            <a:ext cx="2743200" cy="4572000"/>
           </a:xfrm>
           <a:prstGeom prst="roundRect">
             <a:avLst>
-              <a:gd name="adj" fmla="val 10000"/>
+              <a:gd name="adj" fmla="val 8000"/>
             </a:avLst>
           </a:prstGeom>
           <a:solidFill>
@@ -11019,7 +11024,7 @@
       </p:sp>
       <p:pic>
         <p:nvPicPr>
-          <p:cNvPr id="15" name="Picture 14" descr="icon_66.png"/>
+          <p:cNvPr id="15" name="Picture 14" descr="mobile_manager.png"/>
           <p:cNvPicPr>
             <a:picLocks noChangeAspect="1"/>
           </p:cNvPicPr>
@@ -11033,8 +11038,8 @@
         </p:blipFill>
         <p:spPr>
           <a:xfrm>
-            <a:off x="6510528" y="2926080"/>
-            <a:ext cx="502920" cy="502920"/>
+            <a:off x="9509760" y="1737360"/>
+            <a:ext cx="1585874" cy="3520440"/>
           </a:xfrm>
           <a:prstGeom prst="rect">
             <a:avLst/>
@@ -11049,8 +11054,8 @@
         </p:nvSpPr>
         <p:spPr>
           <a:xfrm>
-            <a:off x="7196328" y="2971800"/>
-            <a:ext cx="4114800" cy="457200"/>
+            <a:off x="9372600" y="5349240"/>
+            <a:ext cx="2560320" cy="640080"/>
           </a:xfrm>
           <a:prstGeom prst="rect">
             <a:avLst/>
@@ -11058,14 +11063,14 @@
           <a:noFill/>
         </p:spPr>
         <p:txBody>
-          <a:bodyPr wrap="square" anchor="ctr">
+          <a:bodyPr wrap="square" anchor="t">
             <a:spAutoFit/>
           </a:bodyPr>
           <a:lstStyle/>
           <a:p>
-            <a:pPr algn="l"/>
-            <a:r>
-              <a:rPr sz="1400" b="1">
+            <a:pPr algn="ctr"/>
+            <a:r>
+              <a:rPr sz="1100" b="1">
                 <a:solidFill>
                   <a:srgbClr val="FFFFFF"/>
                 </a:solidFill>
@@ -11073,325 +11078,8 @@
                 <a:ea typeface="Verdana"/>
                 <a:cs typeface="Verdana"/>
               </a:rPr>
-              <a:t>Подписание документов</a:t>
-            </a:r>
-          </a:p>
-        </p:txBody>
-      </p:sp>
-      <p:sp>
-        <p:nvSpPr>
-          <p:cNvPr id="17" name="Rounded Rectangle 16"/>
-          <p:cNvSpPr/>
-          <p:nvPr/>
-        </p:nvSpPr>
-        <p:spPr>
-          <a:xfrm>
-            <a:off x="886968" y="3794760"/>
-            <a:ext cx="5212080" cy="914400"/>
-          </a:xfrm>
-          <a:prstGeom prst="roundRect">
-            <a:avLst>
-              <a:gd name="adj" fmla="val 10000"/>
-            </a:avLst>
-          </a:prstGeom>
-          <a:solidFill>
-            <a:srgbClr val="3F3F3F"/>
-          </a:solidFill>
-          <a:ln>
-            <a:noFill/>
-          </a:ln>
-        </p:spPr>
-        <p:style>
-          <a:lnRef idx="1">
-            <a:schemeClr val="accent1"/>
-          </a:lnRef>
-          <a:fillRef idx="3">
-            <a:schemeClr val="accent1"/>
-          </a:fillRef>
-          <a:effectRef idx="2">
-            <a:schemeClr val="accent1"/>
-          </a:effectRef>
-          <a:fontRef idx="minor">
-            <a:schemeClr val="lt1"/>
-          </a:fontRef>
-        </p:style>
-        <p:txBody>
-          <a:bodyPr rtlCol="0" anchor="ctr"/>
-          <a:lstStyle/>
-          <a:p>
-            <a:pPr algn="ctr"/>
-          </a:p>
-        </p:txBody>
-      </p:sp>
-      <p:pic>
-        <p:nvPicPr>
-          <p:cNvPr id="18" name="Picture 17" descr="icon_59.png"/>
-          <p:cNvPicPr>
-            <a:picLocks noChangeAspect="1"/>
-          </p:cNvPicPr>
-          <p:nvPr/>
-        </p:nvPicPr>
-        <p:blipFill>
-          <a:blip r:embed="rId6"/>
-          <a:stretch>
-            <a:fillRect/>
-          </a:stretch>
-        </p:blipFill>
-        <p:spPr>
-          <a:xfrm>
-            <a:off x="1069848" y="3977640"/>
-            <a:ext cx="502920" cy="502920"/>
-          </a:xfrm>
-          <a:prstGeom prst="rect">
-            <a:avLst/>
-          </a:prstGeom>
-        </p:spPr>
-      </p:pic>
-      <p:sp>
-        <p:nvSpPr>
-          <p:cNvPr id="19" name="TextBox 18"/>
-          <p:cNvSpPr txBox="1"/>
-          <p:nvPr/>
-        </p:nvSpPr>
-        <p:spPr>
-          <a:xfrm>
-            <a:off x="1755648" y="4023360"/>
-            <a:ext cx="4114800" cy="457200"/>
-          </a:xfrm>
-          <a:prstGeom prst="rect">
-            <a:avLst/>
-          </a:prstGeom>
-          <a:noFill/>
-        </p:spPr>
-        <p:txBody>
-          <a:bodyPr wrap="square" anchor="ctr">
-            <a:spAutoFit/>
-          </a:bodyPr>
-          <a:lstStyle/>
-          <a:p>
-            <a:pPr algn="l"/>
-            <a:r>
-              <a:rPr sz="1400" b="1">
-                <a:solidFill>
-                  <a:srgbClr val="FFFFFF"/>
-                </a:solidFill>
-                <a:latin typeface="Verdana"/>
-                <a:ea typeface="Verdana"/>
-                <a:cs typeface="Verdana"/>
-              </a:rPr>
-              <a:t>Выпуск подписи</a:t>
-            </a:r>
-          </a:p>
-        </p:txBody>
-      </p:sp>
-      <p:sp>
-        <p:nvSpPr>
-          <p:cNvPr id="20" name="Rounded Rectangle 19"/>
-          <p:cNvSpPr/>
-          <p:nvPr/>
-        </p:nvSpPr>
-        <p:spPr>
-          <a:xfrm>
-            <a:off x="6327648" y="3794760"/>
-            <a:ext cx="5212080" cy="914400"/>
-          </a:xfrm>
-          <a:prstGeom prst="roundRect">
-            <a:avLst>
-              <a:gd name="adj" fmla="val 10000"/>
-            </a:avLst>
-          </a:prstGeom>
-          <a:solidFill>
-            <a:srgbClr val="3F3F3F"/>
-          </a:solidFill>
-          <a:ln>
-            <a:noFill/>
-          </a:ln>
-        </p:spPr>
-        <p:style>
-          <a:lnRef idx="1">
-            <a:schemeClr val="accent1"/>
-          </a:lnRef>
-          <a:fillRef idx="3">
-            <a:schemeClr val="accent1"/>
-          </a:fillRef>
-          <a:effectRef idx="2">
-            <a:schemeClr val="accent1"/>
-          </a:effectRef>
-          <a:fontRef idx="minor">
-            <a:schemeClr val="lt1"/>
-          </a:fontRef>
-        </p:style>
-        <p:txBody>
-          <a:bodyPr rtlCol="0" anchor="ctr"/>
-          <a:lstStyle/>
-          <a:p>
-            <a:pPr algn="ctr"/>
-          </a:p>
-        </p:txBody>
-      </p:sp>
-      <p:pic>
-        <p:nvPicPr>
-          <p:cNvPr id="21" name="Picture 20" descr="icon_70.png"/>
-          <p:cNvPicPr>
-            <a:picLocks noChangeAspect="1"/>
-          </p:cNvPicPr>
-          <p:nvPr/>
-        </p:nvPicPr>
-        <p:blipFill>
-          <a:blip r:embed="rId7"/>
-          <a:stretch>
-            <a:fillRect/>
-          </a:stretch>
-        </p:blipFill>
-        <p:spPr>
-          <a:xfrm>
-            <a:off x="6510528" y="3977640"/>
-            <a:ext cx="502920" cy="502920"/>
-          </a:xfrm>
-          <a:prstGeom prst="rect">
-            <a:avLst/>
-          </a:prstGeom>
-        </p:spPr>
-      </p:pic>
-      <p:sp>
-        <p:nvSpPr>
-          <p:cNvPr id="22" name="TextBox 21"/>
-          <p:cNvSpPr txBox="1"/>
-          <p:nvPr/>
-        </p:nvSpPr>
-        <p:spPr>
-          <a:xfrm>
-            <a:off x="7196328" y="4023360"/>
-            <a:ext cx="4114800" cy="457200"/>
-          </a:xfrm>
-          <a:prstGeom prst="rect">
-            <a:avLst/>
-          </a:prstGeom>
-          <a:noFill/>
-        </p:spPr>
-        <p:txBody>
-          <a:bodyPr wrap="square" anchor="ctr">
-            <a:spAutoFit/>
-          </a:bodyPr>
-          <a:lstStyle/>
-          <a:p>
-            <a:pPr algn="l"/>
-            <a:r>
-              <a:rPr sz="1400" b="1">
-                <a:solidFill>
-                  <a:srgbClr val="FFFFFF"/>
-                </a:solidFill>
-                <a:latin typeface="Verdana"/>
-                <a:ea typeface="Verdana"/>
-                <a:cs typeface="Verdana"/>
-              </a:rPr>
-              <a:t>Работа мобильного приложения</a:t>
-            </a:r>
-          </a:p>
-        </p:txBody>
-      </p:sp>
-      <p:sp>
-        <p:nvSpPr>
-          <p:cNvPr id="23" name="Rounded Rectangle 22"/>
-          <p:cNvSpPr/>
-          <p:nvPr/>
-        </p:nvSpPr>
-        <p:spPr>
-          <a:xfrm>
-            <a:off x="3607308" y="4846320"/>
-            <a:ext cx="5212080" cy="914400"/>
-          </a:xfrm>
-          <a:prstGeom prst="roundRect">
-            <a:avLst>
-              <a:gd name="adj" fmla="val 10000"/>
-            </a:avLst>
-          </a:prstGeom>
-          <a:solidFill>
-            <a:srgbClr val="3F3F3F"/>
-          </a:solidFill>
-          <a:ln>
-            <a:noFill/>
-          </a:ln>
-        </p:spPr>
-        <p:style>
-          <a:lnRef idx="1">
-            <a:schemeClr val="accent1"/>
-          </a:lnRef>
-          <a:fillRef idx="3">
-            <a:schemeClr val="accent1"/>
-          </a:fillRef>
-          <a:effectRef idx="2">
-            <a:schemeClr val="accent1"/>
-          </a:effectRef>
-          <a:fontRef idx="minor">
-            <a:schemeClr val="lt1"/>
-          </a:fontRef>
-        </p:style>
-        <p:txBody>
-          <a:bodyPr rtlCol="0" anchor="ctr"/>
-          <a:lstStyle/>
-          <a:p>
-            <a:pPr algn="ctr"/>
-          </a:p>
-        </p:txBody>
-      </p:sp>
-      <p:pic>
-        <p:nvPicPr>
-          <p:cNvPr id="24" name="Picture 23" descr="icon_27.png"/>
-          <p:cNvPicPr>
-            <a:picLocks noChangeAspect="1"/>
-          </p:cNvPicPr>
-          <p:nvPr/>
-        </p:nvPicPr>
-        <p:blipFill>
-          <a:blip r:embed="rId8"/>
-          <a:stretch>
-            <a:fillRect/>
-          </a:stretch>
-        </p:blipFill>
-        <p:spPr>
-          <a:xfrm>
-            <a:off x="3790188" y="5029200"/>
-            <a:ext cx="502920" cy="502920"/>
-          </a:xfrm>
-          <a:prstGeom prst="rect">
-            <a:avLst/>
-          </a:prstGeom>
-        </p:spPr>
-      </p:pic>
-      <p:sp>
-        <p:nvSpPr>
-          <p:cNvPr id="25" name="TextBox 24"/>
-          <p:cNvSpPr txBox="1"/>
-          <p:nvPr/>
-        </p:nvSpPr>
-        <p:spPr>
-          <a:xfrm>
-            <a:off x="4475988" y="5074920"/>
-            <a:ext cx="4114800" cy="457200"/>
-          </a:xfrm>
-          <a:prstGeom prst="rect">
-            <a:avLst/>
-          </a:prstGeom>
-          <a:noFill/>
-        </p:spPr>
-        <p:txBody>
-          <a:bodyPr wrap="square" anchor="ctr">
-            <a:spAutoFit/>
-          </a:bodyPr>
-          <a:lstStyle/>
-          <a:p>
-            <a:pPr algn="l"/>
-            <a:r>
-              <a:rPr sz="1400" b="1">
-                <a:solidFill>
-                  <a:srgbClr val="FFFFFF"/>
-                </a:solidFill>
-                <a:latin typeface="Verdana"/>
-                <a:ea typeface="Verdana"/>
-                <a:cs typeface="Verdana"/>
-              </a:rPr>
-              <a:t>Работа кадровика в 1С</a:t>
+              <a:t>Раздел
+руководителя</a:t>
             </a:r>
           </a:p>
         </p:txBody>
@@ -11405,6 +11093,1376 @@
 </file>
 
 <file path=ppt/slides/slide15.xml><?xml version="1.0" encoding="utf-8"?>
+<p:sld xmlns:a="http://schemas.openxmlformats.org/drawingml/2006/main" xmlns:p="http://schemas.openxmlformats.org/presentationml/2006/main" xmlns:r="http://schemas.openxmlformats.org/officeDocument/2006/relationships">
+  <p:cSld>
+    <p:spTree>
+      <p:nvGrpSpPr>
+        <p:cNvPr id="1" name=""/>
+        <p:cNvGrpSpPr/>
+        <p:nvPr/>
+      </p:nvGrpSpPr>
+      <p:grpSpPr/>
+      <p:sp>
+        <p:nvSpPr>
+          <p:cNvPr id="2" name="Title 1"/>
+          <p:cNvSpPr>
+            <a:spLocks noGrp="1"/>
+          </p:cNvSpPr>
+          <p:nvPr>
+            <p:ph type="title"/>
+          </p:nvPr>
+        </p:nvSpPr>
+        <p:spPr/>
+        <p:txBody>
+          <a:bodyPr/>
+          <a:lstStyle/>
+          <a:p>
+            <a:pPr algn="l"/>
+            <a:r>
+              <a:rPr sz="2600" b="1">
+                <a:solidFill>
+                  <a:srgbClr val="FFFFFF"/>
+                </a:solidFill>
+                <a:latin typeface="Verdana"/>
+                <a:ea typeface="Verdana"/>
+                <a:cs typeface="Verdana"/>
+              </a:rPr>
+              <a:t>Работа кадровика прямо в 1С</a:t>
+            </a:r>
+          </a:p>
+        </p:txBody>
+      </p:sp>
+      <p:sp>
+        <p:nvSpPr>
+          <p:cNvPr id="3" name="Text Placeholder 2"/>
+          <p:cNvSpPr>
+            <a:spLocks noGrp="1"/>
+          </p:cNvSpPr>
+          <p:nvPr>
+            <p:ph type="body" idx="13" sz="quarter"/>
+          </p:nvPr>
+        </p:nvSpPr>
+        <p:spPr/>
+        <p:txBody>
+          <a:bodyPr/>
+          <a:lstStyle/>
+          <a:p/>
+        </p:txBody>
+      </p:sp>
+      <p:sp>
+        <p:nvSpPr>
+          <p:cNvPr id="4" name="TextBox 3"/>
+          <p:cNvSpPr txBox="1"/>
+          <p:nvPr/>
+        </p:nvSpPr>
+        <p:spPr>
+          <a:xfrm>
+            <a:off x="886968" y="1143000"/>
+            <a:ext cx="10424160" cy="411480"/>
+          </a:xfrm>
+          <a:prstGeom prst="rect">
+            <a:avLst/>
+          </a:prstGeom>
+          <a:noFill/>
+        </p:spPr>
+        <p:txBody>
+          <a:bodyPr wrap="square" anchor="t">
+            <a:spAutoFit/>
+          </a:bodyPr>
+          <a:lstStyle/>
+          <a:p>
+            <a:pPr algn="l"/>
+            <a:r>
+              <a:rPr sz="1400" b="0">
+                <a:solidFill>
+                  <a:srgbClr val="BFBFBF"/>
+                </a:solidFill>
+                <a:latin typeface="Verdana"/>
+                <a:ea typeface="Verdana"/>
+                <a:cs typeface="Verdana"/>
+              </a:rPr>
+              <a:t>Заявления превращаются в задачи и документы без двойного ввода</a:t>
+            </a:r>
+          </a:p>
+        </p:txBody>
+      </p:sp>
+      <p:sp>
+        <p:nvSpPr>
+          <p:cNvPr id="5" name="Rounded Rectangle 4"/>
+          <p:cNvSpPr/>
+          <p:nvPr/>
+        </p:nvSpPr>
+        <p:spPr>
+          <a:xfrm>
+            <a:off x="640080" y="1554480"/>
+            <a:ext cx="5394960" cy="2331720"/>
+          </a:xfrm>
+          <a:prstGeom prst="roundRect">
+            <a:avLst>
+              <a:gd name="adj" fmla="val 8000"/>
+            </a:avLst>
+          </a:prstGeom>
+          <a:solidFill>
+            <a:srgbClr val="3F3F3F"/>
+          </a:solidFill>
+          <a:ln>
+            <a:noFill/>
+          </a:ln>
+        </p:spPr>
+        <p:style>
+          <a:lnRef idx="1">
+            <a:schemeClr val="accent1"/>
+          </a:lnRef>
+          <a:fillRef idx="3">
+            <a:schemeClr val="accent1"/>
+          </a:fillRef>
+          <a:effectRef idx="2">
+            <a:schemeClr val="accent1"/>
+          </a:effectRef>
+          <a:fontRef idx="minor">
+            <a:schemeClr val="lt1"/>
+          </a:fontRef>
+        </p:style>
+        <p:txBody>
+          <a:bodyPr rtlCol="0" anchor="ctr"/>
+          <a:lstStyle/>
+          <a:p>
+            <a:pPr algn="ctr"/>
+          </a:p>
+        </p:txBody>
+      </p:sp>
+      <p:pic>
+        <p:nvPicPr>
+          <p:cNvPr id="6" name="Picture 5" descr="1c_vacation_task.png"/>
+          <p:cNvPicPr>
+            <a:picLocks noChangeAspect="1"/>
+          </p:cNvPicPr>
+          <p:nvPr/>
+        </p:nvPicPr>
+        <p:blipFill>
+          <a:blip r:embed="rId2"/>
+          <a:stretch>
+            <a:fillRect/>
+          </a:stretch>
+        </p:blipFill>
+        <p:spPr>
+          <a:xfrm>
+            <a:off x="777240" y="1664208"/>
+            <a:ext cx="5120640" cy="3181334"/>
+          </a:xfrm>
+          <a:prstGeom prst="rect">
+            <a:avLst/>
+          </a:prstGeom>
+        </p:spPr>
+      </p:pic>
+      <p:sp>
+        <p:nvSpPr>
+          <p:cNvPr id="7" name="TextBox 6"/>
+          <p:cNvSpPr txBox="1"/>
+          <p:nvPr/>
+        </p:nvSpPr>
+        <p:spPr>
+          <a:xfrm>
+            <a:off x="777240" y="3474720"/>
+            <a:ext cx="5120640" cy="320040"/>
+          </a:xfrm>
+          <a:prstGeom prst="rect">
+            <a:avLst/>
+          </a:prstGeom>
+          <a:noFill/>
+        </p:spPr>
+        <p:txBody>
+          <a:bodyPr wrap="square" anchor="t">
+            <a:spAutoFit/>
+          </a:bodyPr>
+          <a:lstStyle/>
+          <a:p>
+            <a:pPr algn="l"/>
+            <a:r>
+              <a:rPr sz="1200" b="1">
+                <a:solidFill>
+                  <a:srgbClr val="26A6E0"/>
+                </a:solidFill>
+                <a:latin typeface="Verdana"/>
+                <a:ea typeface="Verdana"/>
+                <a:cs typeface="Verdana"/>
+              </a:rPr>
+              <a:t>Задача по заявлению на отпуск</a:t>
+            </a:r>
+          </a:p>
+        </p:txBody>
+      </p:sp>
+      <p:sp>
+        <p:nvSpPr>
+          <p:cNvPr id="8" name="Rounded Rectangle 7"/>
+          <p:cNvSpPr/>
+          <p:nvPr/>
+        </p:nvSpPr>
+        <p:spPr>
+          <a:xfrm>
+            <a:off x="6263640" y="1554480"/>
+            <a:ext cx="5394960" cy="2331720"/>
+          </a:xfrm>
+          <a:prstGeom prst="roundRect">
+            <a:avLst>
+              <a:gd name="adj" fmla="val 8000"/>
+            </a:avLst>
+          </a:prstGeom>
+          <a:solidFill>
+            <a:srgbClr val="3F3F3F"/>
+          </a:solidFill>
+          <a:ln>
+            <a:noFill/>
+          </a:ln>
+        </p:spPr>
+        <p:style>
+          <a:lnRef idx="1">
+            <a:schemeClr val="accent1"/>
+          </a:lnRef>
+          <a:fillRef idx="3">
+            <a:schemeClr val="accent1"/>
+          </a:fillRef>
+          <a:effectRef idx="2">
+            <a:schemeClr val="accent1"/>
+          </a:effectRef>
+          <a:fontRef idx="minor">
+            <a:schemeClr val="lt1"/>
+          </a:fontRef>
+        </p:style>
+        <p:txBody>
+          <a:bodyPr rtlCol="0" anchor="ctr"/>
+          <a:lstStyle/>
+          <a:p>
+            <a:pPr algn="ctr"/>
+          </a:p>
+        </p:txBody>
+      </p:sp>
+      <p:pic>
+        <p:nvPicPr>
+          <p:cNvPr id="9" name="Picture 8" descr="1c_transfer_to_cabinet.png"/>
+          <p:cNvPicPr>
+            <a:picLocks noChangeAspect="1"/>
+          </p:cNvPicPr>
+          <p:nvPr/>
+        </p:nvPicPr>
+        <p:blipFill>
+          <a:blip r:embed="rId3"/>
+          <a:stretch>
+            <a:fillRect/>
+          </a:stretch>
+        </p:blipFill>
+        <p:spPr>
+          <a:xfrm>
+            <a:off x="6400800" y="1664208"/>
+            <a:ext cx="5120640" cy="2282539"/>
+          </a:xfrm>
+          <a:prstGeom prst="rect">
+            <a:avLst/>
+          </a:prstGeom>
+        </p:spPr>
+      </p:pic>
+      <p:sp>
+        <p:nvSpPr>
+          <p:cNvPr id="10" name="TextBox 9"/>
+          <p:cNvSpPr txBox="1"/>
+          <p:nvPr/>
+        </p:nvSpPr>
+        <p:spPr>
+          <a:xfrm>
+            <a:off x="6400800" y="3474720"/>
+            <a:ext cx="5120640" cy="320040"/>
+          </a:xfrm>
+          <a:prstGeom prst="rect">
+            <a:avLst/>
+          </a:prstGeom>
+          <a:noFill/>
+        </p:spPr>
+        <p:txBody>
+          <a:bodyPr wrap="square" anchor="t">
+            <a:spAutoFit/>
+          </a:bodyPr>
+          <a:lstStyle/>
+          <a:p>
+            <a:pPr algn="l"/>
+            <a:r>
+              <a:rPr sz="1200" b="1">
+                <a:solidFill>
+                  <a:srgbClr val="26A6E0"/>
+                </a:solidFill>
+                <a:latin typeface="Verdana"/>
+                <a:ea typeface="Verdana"/>
+                <a:cs typeface="Verdana"/>
+              </a:rPr>
+              <a:t>Кнопка «Передать в 1С:Кабинет сотрудника»</a:t>
+            </a:r>
+          </a:p>
+        </p:txBody>
+      </p:sp>
+      <p:sp>
+        <p:nvSpPr>
+          <p:cNvPr id="11" name="Rounded Rectangle 10"/>
+          <p:cNvSpPr/>
+          <p:nvPr/>
+        </p:nvSpPr>
+        <p:spPr>
+          <a:xfrm>
+            <a:off x="640080" y="4069080"/>
+            <a:ext cx="5394960" cy="2011680"/>
+          </a:xfrm>
+          <a:prstGeom prst="roundRect">
+            <a:avLst>
+              <a:gd name="adj" fmla="val 8000"/>
+            </a:avLst>
+          </a:prstGeom>
+          <a:solidFill>
+            <a:srgbClr val="3F3F3F"/>
+          </a:solidFill>
+          <a:ln>
+            <a:noFill/>
+          </a:ln>
+        </p:spPr>
+        <p:style>
+          <a:lnRef idx="1">
+            <a:schemeClr val="accent1"/>
+          </a:lnRef>
+          <a:fillRef idx="3">
+            <a:schemeClr val="accent1"/>
+          </a:fillRef>
+          <a:effectRef idx="2">
+            <a:schemeClr val="accent1"/>
+          </a:effectRef>
+          <a:fontRef idx="minor">
+            <a:schemeClr val="lt1"/>
+          </a:fontRef>
+        </p:style>
+        <p:txBody>
+          <a:bodyPr rtlCol="0" anchor="ctr"/>
+          <a:lstStyle/>
+          <a:p>
+            <a:pPr algn="ctr"/>
+          </a:p>
+        </p:txBody>
+      </p:sp>
+      <p:pic>
+        <p:nvPicPr>
+          <p:cNvPr id="12" name="Picture 11" descr="1c_kedo_documents.png"/>
+          <p:cNvPicPr>
+            <a:picLocks noChangeAspect="1"/>
+          </p:cNvPicPr>
+          <p:nvPr/>
+        </p:nvPicPr>
+        <p:blipFill>
+          <a:blip r:embed="rId4"/>
+          <a:stretch>
+            <a:fillRect/>
+          </a:stretch>
+        </p:blipFill>
+        <p:spPr>
+          <a:xfrm>
+            <a:off x="777240" y="4178808"/>
+            <a:ext cx="5120640" cy="1647009"/>
+          </a:xfrm>
+          <a:prstGeom prst="rect">
+            <a:avLst/>
+          </a:prstGeom>
+        </p:spPr>
+      </p:pic>
+      <p:sp>
+        <p:nvSpPr>
+          <p:cNvPr id="13" name="TextBox 12"/>
+          <p:cNvSpPr txBox="1"/>
+          <p:nvPr/>
+        </p:nvSpPr>
+        <p:spPr>
+          <a:xfrm>
+            <a:off x="777240" y="5669280"/>
+            <a:ext cx="5120640" cy="320040"/>
+          </a:xfrm>
+          <a:prstGeom prst="rect">
+            <a:avLst/>
+          </a:prstGeom>
+          <a:noFill/>
+        </p:spPr>
+        <p:txBody>
+          <a:bodyPr wrap="square" anchor="t">
+            <a:spAutoFit/>
+          </a:bodyPr>
+          <a:lstStyle/>
+          <a:p>
+            <a:pPr algn="l"/>
+            <a:r>
+              <a:rPr sz="1200" b="1">
+                <a:solidFill>
+                  <a:srgbClr val="26A6E0"/>
+                </a:solidFill>
+                <a:latin typeface="Verdana"/>
+                <a:ea typeface="Verdana"/>
+                <a:cs typeface="Verdana"/>
+              </a:rPr>
+              <a:t>Журнал документов кадрового ЭДО</a:t>
+            </a:r>
+          </a:p>
+        </p:txBody>
+      </p:sp>
+      <p:sp>
+        <p:nvSpPr>
+          <p:cNvPr id="14" name="Rounded Rectangle 13"/>
+          <p:cNvSpPr/>
+          <p:nvPr/>
+        </p:nvSpPr>
+        <p:spPr>
+          <a:xfrm>
+            <a:off x="6263640" y="4069080"/>
+            <a:ext cx="5394960" cy="2011680"/>
+          </a:xfrm>
+          <a:prstGeom prst="roundRect">
+            <a:avLst>
+              <a:gd name="adj" fmla="val 8000"/>
+            </a:avLst>
+          </a:prstGeom>
+          <a:solidFill>
+            <a:srgbClr val="3F3F3F"/>
+          </a:solidFill>
+          <a:ln>
+            <a:noFill/>
+          </a:ln>
+        </p:spPr>
+        <p:style>
+          <a:lnRef idx="1">
+            <a:schemeClr val="accent1"/>
+          </a:lnRef>
+          <a:fillRef idx="3">
+            <a:schemeClr val="accent1"/>
+          </a:fillRef>
+          <a:effectRef idx="2">
+            <a:schemeClr val="accent1"/>
+          </a:effectRef>
+          <a:fontRef idx="minor">
+            <a:schemeClr val="lt1"/>
+          </a:fontRef>
+        </p:style>
+        <p:txBody>
+          <a:bodyPr rtlCol="0" anchor="ctr"/>
+          <a:lstStyle/>
+          <a:p>
+            <a:pPr algn="ctr"/>
+          </a:p>
+        </p:txBody>
+      </p:sp>
+      <p:pic>
+        <p:nvPicPr>
+          <p:cNvPr id="15" name="Picture 14" descr="1c_hire_print_forms.png"/>
+          <p:cNvPicPr>
+            <a:picLocks noChangeAspect="1"/>
+          </p:cNvPicPr>
+          <p:nvPr/>
+        </p:nvPicPr>
+        <p:blipFill>
+          <a:blip r:embed="rId5"/>
+          <a:stretch>
+            <a:fillRect/>
+          </a:stretch>
+        </p:blipFill>
+        <p:spPr>
+          <a:xfrm>
+            <a:off x="6400800" y="4178808"/>
+            <a:ext cx="5120640" cy="2732049"/>
+          </a:xfrm>
+          <a:prstGeom prst="rect">
+            <a:avLst/>
+          </a:prstGeom>
+        </p:spPr>
+      </p:pic>
+      <p:sp>
+        <p:nvSpPr>
+          <p:cNvPr id="16" name="TextBox 15"/>
+          <p:cNvSpPr txBox="1"/>
+          <p:nvPr/>
+        </p:nvSpPr>
+        <p:spPr>
+          <a:xfrm>
+            <a:off x="6400800" y="5669280"/>
+            <a:ext cx="5120640" cy="320040"/>
+          </a:xfrm>
+          <a:prstGeom prst="rect">
+            <a:avLst/>
+          </a:prstGeom>
+          <a:noFill/>
+        </p:spPr>
+        <p:txBody>
+          <a:bodyPr wrap="square" anchor="t">
+            <a:spAutoFit/>
+          </a:bodyPr>
+          <a:lstStyle/>
+          <a:p>
+            <a:pPr algn="l"/>
+            <a:r>
+              <a:rPr sz="1200" b="1">
+                <a:solidFill>
+                  <a:srgbClr val="26A6E0"/>
+                </a:solidFill>
+                <a:latin typeface="Verdana"/>
+                <a:ea typeface="Verdana"/>
+                <a:cs typeface="Verdana"/>
+              </a:rPr>
+              <a:t>Печатные формы при приёме → в КС</a:t>
+            </a:r>
+          </a:p>
+        </p:txBody>
+      </p:sp>
+    </p:spTree>
+  </p:cSld>
+  <p:clrMapOvr>
+    <a:masterClrMapping/>
+  </p:clrMapOvr>
+</p:sld>
+</file>
+
+<file path=ppt/slides/slide16.xml><?xml version="1.0" encoding="utf-8"?>
+<p:sld xmlns:a="http://schemas.openxmlformats.org/drawingml/2006/main" xmlns:p="http://schemas.openxmlformats.org/presentationml/2006/main" xmlns:r="http://schemas.openxmlformats.org/officeDocument/2006/relationships">
+  <p:cSld>
+    <p:spTree>
+      <p:nvGrpSpPr>
+        <p:cNvPr id="1" name=""/>
+        <p:cNvGrpSpPr/>
+        <p:nvPr/>
+      </p:nvGrpSpPr>
+      <p:grpSpPr/>
+      <p:sp>
+        <p:nvSpPr>
+          <p:cNvPr id="2" name="Title 1"/>
+          <p:cNvSpPr>
+            <a:spLocks noGrp="1"/>
+          </p:cNvSpPr>
+          <p:nvPr>
+            <p:ph type="title"/>
+          </p:nvPr>
+        </p:nvSpPr>
+        <p:spPr/>
+        <p:txBody>
+          <a:bodyPr/>
+          <a:lstStyle/>
+          <a:p>
+            <a:pPr algn="l"/>
+            <a:r>
+              <a:rPr sz="2600" b="1">
+                <a:solidFill>
+                  <a:srgbClr val="FFFFFF"/>
+                </a:solidFill>
+                <a:latin typeface="Verdana"/>
+                <a:ea typeface="Verdana"/>
+                <a:cs typeface="Verdana"/>
+              </a:rPr>
+              <a:t>Что покажем на демонстрации</a:t>
+            </a:r>
+          </a:p>
+        </p:txBody>
+      </p:sp>
+      <p:sp>
+        <p:nvSpPr>
+          <p:cNvPr id="3" name="Text Placeholder 2"/>
+          <p:cNvSpPr>
+            <a:spLocks noGrp="1"/>
+          </p:cNvSpPr>
+          <p:nvPr>
+            <p:ph type="body" idx="13" sz="quarter"/>
+          </p:nvPr>
+        </p:nvSpPr>
+        <p:spPr/>
+        <p:txBody>
+          <a:bodyPr/>
+          <a:lstStyle/>
+          <a:p/>
+        </p:txBody>
+      </p:sp>
+      <p:sp>
+        <p:nvSpPr>
+          <p:cNvPr id="4" name="TextBox 3"/>
+          <p:cNvSpPr txBox="1"/>
+          <p:nvPr/>
+        </p:nvSpPr>
+        <p:spPr>
+          <a:xfrm>
+            <a:off x="886968" y="1143000"/>
+            <a:ext cx="10424160" cy="411480"/>
+          </a:xfrm>
+          <a:prstGeom prst="rect">
+            <a:avLst/>
+          </a:prstGeom>
+          <a:noFill/>
+        </p:spPr>
+        <p:txBody>
+          <a:bodyPr wrap="square" anchor="t">
+            <a:spAutoFit/>
+          </a:bodyPr>
+          <a:lstStyle/>
+          <a:p>
+            <a:pPr algn="l"/>
+            <a:r>
+              <a:rPr sz="1400" b="0">
+                <a:solidFill>
+                  <a:srgbClr val="BFBFBF"/>
+                </a:solidFill>
+                <a:latin typeface="Verdana"/>
+                <a:ea typeface="Verdana"/>
+                <a:cs typeface="Verdana"/>
+              </a:rPr>
+              <a:t>После экранов выше — живая демонстрация на ваших процессах</a:t>
+            </a:r>
+          </a:p>
+        </p:txBody>
+      </p:sp>
+      <p:sp>
+        <p:nvSpPr>
+          <p:cNvPr id="5" name="Rounded Rectangle 4"/>
+          <p:cNvSpPr/>
+          <p:nvPr/>
+        </p:nvSpPr>
+        <p:spPr>
+          <a:xfrm>
+            <a:off x="886968" y="1691640"/>
+            <a:ext cx="5212080" cy="914400"/>
+          </a:xfrm>
+          <a:prstGeom prst="roundRect">
+            <a:avLst>
+              <a:gd name="adj" fmla="val 10000"/>
+            </a:avLst>
+          </a:prstGeom>
+          <a:solidFill>
+            <a:srgbClr val="3F3F3F"/>
+          </a:solidFill>
+          <a:ln>
+            <a:noFill/>
+          </a:ln>
+        </p:spPr>
+        <p:style>
+          <a:lnRef idx="1">
+            <a:schemeClr val="accent1"/>
+          </a:lnRef>
+          <a:fillRef idx="3">
+            <a:schemeClr val="accent1"/>
+          </a:fillRef>
+          <a:effectRef idx="2">
+            <a:schemeClr val="accent1"/>
+          </a:effectRef>
+          <a:fontRef idx="minor">
+            <a:schemeClr val="lt1"/>
+          </a:fontRef>
+        </p:style>
+        <p:txBody>
+          <a:bodyPr rtlCol="0" anchor="ctr"/>
+          <a:lstStyle/>
+          <a:p>
+            <a:pPr algn="ctr"/>
+          </a:p>
+        </p:txBody>
+      </p:sp>
+      <p:pic>
+        <p:nvPicPr>
+          <p:cNvPr id="6" name="Picture 5" descr="icon_55.png"/>
+          <p:cNvPicPr>
+            <a:picLocks noChangeAspect="1"/>
+          </p:cNvPicPr>
+          <p:nvPr/>
+        </p:nvPicPr>
+        <p:blipFill>
+          <a:blip r:embed="rId2"/>
+          <a:stretch>
+            <a:fillRect/>
+          </a:stretch>
+        </p:blipFill>
+        <p:spPr>
+          <a:xfrm>
+            <a:off x="1069848" y="1874520"/>
+            <a:ext cx="502920" cy="502920"/>
+          </a:xfrm>
+          <a:prstGeom prst="rect">
+            <a:avLst/>
+          </a:prstGeom>
+        </p:spPr>
+      </p:pic>
+      <p:sp>
+        <p:nvSpPr>
+          <p:cNvPr id="7" name="TextBox 6"/>
+          <p:cNvSpPr txBox="1"/>
+          <p:nvPr/>
+        </p:nvSpPr>
+        <p:spPr>
+          <a:xfrm>
+            <a:off x="1755648" y="1920240"/>
+            <a:ext cx="4114800" cy="457200"/>
+          </a:xfrm>
+          <a:prstGeom prst="rect">
+            <a:avLst/>
+          </a:prstGeom>
+          <a:noFill/>
+        </p:spPr>
+        <p:txBody>
+          <a:bodyPr wrap="square" anchor="ctr">
+            <a:spAutoFit/>
+          </a:bodyPr>
+          <a:lstStyle/>
+          <a:p>
+            <a:pPr algn="l"/>
+            <a:r>
+              <a:rPr sz="1400" b="1">
+                <a:solidFill>
+                  <a:srgbClr val="FFFFFF"/>
+                </a:solidFill>
+                <a:latin typeface="Verdana"/>
+                <a:ea typeface="Verdana"/>
+                <a:cs typeface="Verdana"/>
+              </a:rPr>
+              <a:t>Оформление отпуска</a:t>
+            </a:r>
+          </a:p>
+        </p:txBody>
+      </p:sp>
+      <p:sp>
+        <p:nvSpPr>
+          <p:cNvPr id="8" name="Rounded Rectangle 7"/>
+          <p:cNvSpPr/>
+          <p:nvPr/>
+        </p:nvSpPr>
+        <p:spPr>
+          <a:xfrm>
+            <a:off x="6327648" y="1691640"/>
+            <a:ext cx="5212080" cy="914400"/>
+          </a:xfrm>
+          <a:prstGeom prst="roundRect">
+            <a:avLst>
+              <a:gd name="adj" fmla="val 10000"/>
+            </a:avLst>
+          </a:prstGeom>
+          <a:solidFill>
+            <a:srgbClr val="3F3F3F"/>
+          </a:solidFill>
+          <a:ln>
+            <a:noFill/>
+          </a:ln>
+        </p:spPr>
+        <p:style>
+          <a:lnRef idx="1">
+            <a:schemeClr val="accent1"/>
+          </a:lnRef>
+          <a:fillRef idx="3">
+            <a:schemeClr val="accent1"/>
+          </a:fillRef>
+          <a:effectRef idx="2">
+            <a:schemeClr val="accent1"/>
+          </a:effectRef>
+          <a:fontRef idx="minor">
+            <a:schemeClr val="lt1"/>
+          </a:fontRef>
+        </p:style>
+        <p:txBody>
+          <a:bodyPr rtlCol="0" anchor="ctr"/>
+          <a:lstStyle/>
+          <a:p>
+            <a:pPr algn="ctr"/>
+          </a:p>
+        </p:txBody>
+      </p:sp>
+      <p:pic>
+        <p:nvPicPr>
+          <p:cNvPr id="9" name="Picture 8" descr="icon_22.png"/>
+          <p:cNvPicPr>
+            <a:picLocks noChangeAspect="1"/>
+          </p:cNvPicPr>
+          <p:nvPr/>
+        </p:nvPicPr>
+        <p:blipFill>
+          <a:blip r:embed="rId3"/>
+          <a:stretch>
+            <a:fillRect/>
+          </a:stretch>
+        </p:blipFill>
+        <p:spPr>
+          <a:xfrm>
+            <a:off x="6510528" y="1874520"/>
+            <a:ext cx="502920" cy="502920"/>
+          </a:xfrm>
+          <a:prstGeom prst="rect">
+            <a:avLst/>
+          </a:prstGeom>
+        </p:spPr>
+      </p:pic>
+      <p:sp>
+        <p:nvSpPr>
+          <p:cNvPr id="10" name="TextBox 9"/>
+          <p:cNvSpPr txBox="1"/>
+          <p:nvPr/>
+        </p:nvSpPr>
+        <p:spPr>
+          <a:xfrm>
+            <a:off x="7196328" y="1920240"/>
+            <a:ext cx="4114800" cy="457200"/>
+          </a:xfrm>
+          <a:prstGeom prst="rect">
+            <a:avLst/>
+          </a:prstGeom>
+          <a:noFill/>
+        </p:spPr>
+        <p:txBody>
+          <a:bodyPr wrap="square" anchor="ctr">
+            <a:spAutoFit/>
+          </a:bodyPr>
+          <a:lstStyle/>
+          <a:p>
+            <a:pPr algn="l"/>
+            <a:r>
+              <a:rPr sz="1400" b="1">
+                <a:solidFill>
+                  <a:srgbClr val="FFFFFF"/>
+                </a:solidFill>
+                <a:latin typeface="Verdana"/>
+                <a:ea typeface="Verdana"/>
+                <a:cs typeface="Verdana"/>
+              </a:rPr>
+              <a:t>Отправка расчётного листка</a:t>
+            </a:r>
+          </a:p>
+        </p:txBody>
+      </p:sp>
+      <p:sp>
+        <p:nvSpPr>
+          <p:cNvPr id="11" name="Rounded Rectangle 10"/>
+          <p:cNvSpPr/>
+          <p:nvPr/>
+        </p:nvSpPr>
+        <p:spPr>
+          <a:xfrm>
+            <a:off x="886968" y="2743200"/>
+            <a:ext cx="5212080" cy="914400"/>
+          </a:xfrm>
+          <a:prstGeom prst="roundRect">
+            <a:avLst>
+              <a:gd name="adj" fmla="val 10000"/>
+            </a:avLst>
+          </a:prstGeom>
+          <a:solidFill>
+            <a:srgbClr val="3F3F3F"/>
+          </a:solidFill>
+          <a:ln>
+            <a:noFill/>
+          </a:ln>
+        </p:spPr>
+        <p:style>
+          <a:lnRef idx="1">
+            <a:schemeClr val="accent1"/>
+          </a:lnRef>
+          <a:fillRef idx="3">
+            <a:schemeClr val="accent1"/>
+          </a:fillRef>
+          <a:effectRef idx="2">
+            <a:schemeClr val="accent1"/>
+          </a:effectRef>
+          <a:fontRef idx="minor">
+            <a:schemeClr val="lt1"/>
+          </a:fontRef>
+        </p:style>
+        <p:txBody>
+          <a:bodyPr rtlCol="0" anchor="ctr"/>
+          <a:lstStyle/>
+          <a:p>
+            <a:pPr algn="ctr"/>
+          </a:p>
+        </p:txBody>
+      </p:sp>
+      <p:pic>
+        <p:nvPicPr>
+          <p:cNvPr id="12" name="Picture 11" descr="icon_69.png"/>
+          <p:cNvPicPr>
+            <a:picLocks noChangeAspect="1"/>
+          </p:cNvPicPr>
+          <p:nvPr/>
+        </p:nvPicPr>
+        <p:blipFill>
+          <a:blip r:embed="rId4"/>
+          <a:stretch>
+            <a:fillRect/>
+          </a:stretch>
+        </p:blipFill>
+        <p:spPr>
+          <a:xfrm>
+            <a:off x="1069848" y="2926080"/>
+            <a:ext cx="502920" cy="502920"/>
+          </a:xfrm>
+          <a:prstGeom prst="rect">
+            <a:avLst/>
+          </a:prstGeom>
+        </p:spPr>
+      </p:pic>
+      <p:sp>
+        <p:nvSpPr>
+          <p:cNvPr id="13" name="TextBox 12"/>
+          <p:cNvSpPr txBox="1"/>
+          <p:nvPr/>
+        </p:nvSpPr>
+        <p:spPr>
+          <a:xfrm>
+            <a:off x="1755648" y="2971800"/>
+            <a:ext cx="4114800" cy="457200"/>
+          </a:xfrm>
+          <a:prstGeom prst="rect">
+            <a:avLst/>
+          </a:prstGeom>
+          <a:noFill/>
+        </p:spPr>
+        <p:txBody>
+          <a:bodyPr wrap="square" anchor="ctr">
+            <a:spAutoFit/>
+          </a:bodyPr>
+          <a:lstStyle/>
+          <a:p>
+            <a:pPr algn="l"/>
+            <a:r>
+              <a:rPr sz="1400" b="1">
+                <a:solidFill>
+                  <a:srgbClr val="FFFFFF"/>
+                </a:solidFill>
+                <a:latin typeface="Verdana"/>
+                <a:ea typeface="Verdana"/>
+                <a:cs typeface="Verdana"/>
+              </a:rPr>
+              <a:t>Согласование руководителем</a:t>
+            </a:r>
+          </a:p>
+        </p:txBody>
+      </p:sp>
+      <p:sp>
+        <p:nvSpPr>
+          <p:cNvPr id="14" name="Rounded Rectangle 13"/>
+          <p:cNvSpPr/>
+          <p:nvPr/>
+        </p:nvSpPr>
+        <p:spPr>
+          <a:xfrm>
+            <a:off x="6327648" y="2743200"/>
+            <a:ext cx="5212080" cy="914400"/>
+          </a:xfrm>
+          <a:prstGeom prst="roundRect">
+            <a:avLst>
+              <a:gd name="adj" fmla="val 10000"/>
+            </a:avLst>
+          </a:prstGeom>
+          <a:solidFill>
+            <a:srgbClr val="3F3F3F"/>
+          </a:solidFill>
+          <a:ln>
+            <a:noFill/>
+          </a:ln>
+        </p:spPr>
+        <p:style>
+          <a:lnRef idx="1">
+            <a:schemeClr val="accent1"/>
+          </a:lnRef>
+          <a:fillRef idx="3">
+            <a:schemeClr val="accent1"/>
+          </a:fillRef>
+          <a:effectRef idx="2">
+            <a:schemeClr val="accent1"/>
+          </a:effectRef>
+          <a:fontRef idx="minor">
+            <a:schemeClr val="lt1"/>
+          </a:fontRef>
+        </p:style>
+        <p:txBody>
+          <a:bodyPr rtlCol="0" anchor="ctr"/>
+          <a:lstStyle/>
+          <a:p>
+            <a:pPr algn="ctr"/>
+          </a:p>
+        </p:txBody>
+      </p:sp>
+      <p:pic>
+        <p:nvPicPr>
+          <p:cNvPr id="15" name="Picture 14" descr="icon_66.png"/>
+          <p:cNvPicPr>
+            <a:picLocks noChangeAspect="1"/>
+          </p:cNvPicPr>
+          <p:nvPr/>
+        </p:nvPicPr>
+        <p:blipFill>
+          <a:blip r:embed="rId5"/>
+          <a:stretch>
+            <a:fillRect/>
+          </a:stretch>
+        </p:blipFill>
+        <p:spPr>
+          <a:xfrm>
+            <a:off x="6510528" y="2926080"/>
+            <a:ext cx="502920" cy="502920"/>
+          </a:xfrm>
+          <a:prstGeom prst="rect">
+            <a:avLst/>
+          </a:prstGeom>
+        </p:spPr>
+      </p:pic>
+      <p:sp>
+        <p:nvSpPr>
+          <p:cNvPr id="16" name="TextBox 15"/>
+          <p:cNvSpPr txBox="1"/>
+          <p:nvPr/>
+        </p:nvSpPr>
+        <p:spPr>
+          <a:xfrm>
+            <a:off x="7196328" y="2971800"/>
+            <a:ext cx="4114800" cy="457200"/>
+          </a:xfrm>
+          <a:prstGeom prst="rect">
+            <a:avLst/>
+          </a:prstGeom>
+          <a:noFill/>
+        </p:spPr>
+        <p:txBody>
+          <a:bodyPr wrap="square" anchor="ctr">
+            <a:spAutoFit/>
+          </a:bodyPr>
+          <a:lstStyle/>
+          <a:p>
+            <a:pPr algn="l"/>
+            <a:r>
+              <a:rPr sz="1400" b="1">
+                <a:solidFill>
+                  <a:srgbClr val="FFFFFF"/>
+                </a:solidFill>
+                <a:latin typeface="Verdana"/>
+                <a:ea typeface="Verdana"/>
+                <a:cs typeface="Verdana"/>
+              </a:rPr>
+              <a:t>Подписание документов</a:t>
+            </a:r>
+          </a:p>
+        </p:txBody>
+      </p:sp>
+      <p:sp>
+        <p:nvSpPr>
+          <p:cNvPr id="17" name="Rounded Rectangle 16"/>
+          <p:cNvSpPr/>
+          <p:nvPr/>
+        </p:nvSpPr>
+        <p:spPr>
+          <a:xfrm>
+            <a:off x="886968" y="3794760"/>
+            <a:ext cx="5212080" cy="914400"/>
+          </a:xfrm>
+          <a:prstGeom prst="roundRect">
+            <a:avLst>
+              <a:gd name="adj" fmla="val 10000"/>
+            </a:avLst>
+          </a:prstGeom>
+          <a:solidFill>
+            <a:srgbClr val="3F3F3F"/>
+          </a:solidFill>
+          <a:ln>
+            <a:noFill/>
+          </a:ln>
+        </p:spPr>
+        <p:style>
+          <a:lnRef idx="1">
+            <a:schemeClr val="accent1"/>
+          </a:lnRef>
+          <a:fillRef idx="3">
+            <a:schemeClr val="accent1"/>
+          </a:fillRef>
+          <a:effectRef idx="2">
+            <a:schemeClr val="accent1"/>
+          </a:effectRef>
+          <a:fontRef idx="minor">
+            <a:schemeClr val="lt1"/>
+          </a:fontRef>
+        </p:style>
+        <p:txBody>
+          <a:bodyPr rtlCol="0" anchor="ctr"/>
+          <a:lstStyle/>
+          <a:p>
+            <a:pPr algn="ctr"/>
+          </a:p>
+        </p:txBody>
+      </p:sp>
+      <p:pic>
+        <p:nvPicPr>
+          <p:cNvPr id="18" name="Picture 17" descr="icon_59.png"/>
+          <p:cNvPicPr>
+            <a:picLocks noChangeAspect="1"/>
+          </p:cNvPicPr>
+          <p:nvPr/>
+        </p:nvPicPr>
+        <p:blipFill>
+          <a:blip r:embed="rId6"/>
+          <a:stretch>
+            <a:fillRect/>
+          </a:stretch>
+        </p:blipFill>
+        <p:spPr>
+          <a:xfrm>
+            <a:off x="1069848" y="3977640"/>
+            <a:ext cx="502920" cy="502920"/>
+          </a:xfrm>
+          <a:prstGeom prst="rect">
+            <a:avLst/>
+          </a:prstGeom>
+        </p:spPr>
+      </p:pic>
+      <p:sp>
+        <p:nvSpPr>
+          <p:cNvPr id="19" name="TextBox 18"/>
+          <p:cNvSpPr txBox="1"/>
+          <p:nvPr/>
+        </p:nvSpPr>
+        <p:spPr>
+          <a:xfrm>
+            <a:off x="1755648" y="4023360"/>
+            <a:ext cx="4114800" cy="457200"/>
+          </a:xfrm>
+          <a:prstGeom prst="rect">
+            <a:avLst/>
+          </a:prstGeom>
+          <a:noFill/>
+        </p:spPr>
+        <p:txBody>
+          <a:bodyPr wrap="square" anchor="ctr">
+            <a:spAutoFit/>
+          </a:bodyPr>
+          <a:lstStyle/>
+          <a:p>
+            <a:pPr algn="l"/>
+            <a:r>
+              <a:rPr sz="1400" b="1">
+                <a:solidFill>
+                  <a:srgbClr val="FFFFFF"/>
+                </a:solidFill>
+                <a:latin typeface="Verdana"/>
+                <a:ea typeface="Verdana"/>
+                <a:cs typeface="Verdana"/>
+              </a:rPr>
+              <a:t>Выпуск подписи</a:t>
+            </a:r>
+          </a:p>
+        </p:txBody>
+      </p:sp>
+      <p:sp>
+        <p:nvSpPr>
+          <p:cNvPr id="20" name="Rounded Rectangle 19"/>
+          <p:cNvSpPr/>
+          <p:nvPr/>
+        </p:nvSpPr>
+        <p:spPr>
+          <a:xfrm>
+            <a:off x="6327648" y="3794760"/>
+            <a:ext cx="5212080" cy="914400"/>
+          </a:xfrm>
+          <a:prstGeom prst="roundRect">
+            <a:avLst>
+              <a:gd name="adj" fmla="val 10000"/>
+            </a:avLst>
+          </a:prstGeom>
+          <a:solidFill>
+            <a:srgbClr val="3F3F3F"/>
+          </a:solidFill>
+          <a:ln>
+            <a:noFill/>
+          </a:ln>
+        </p:spPr>
+        <p:style>
+          <a:lnRef idx="1">
+            <a:schemeClr val="accent1"/>
+          </a:lnRef>
+          <a:fillRef idx="3">
+            <a:schemeClr val="accent1"/>
+          </a:fillRef>
+          <a:effectRef idx="2">
+            <a:schemeClr val="accent1"/>
+          </a:effectRef>
+          <a:fontRef idx="minor">
+            <a:schemeClr val="lt1"/>
+          </a:fontRef>
+        </p:style>
+        <p:txBody>
+          <a:bodyPr rtlCol="0" anchor="ctr"/>
+          <a:lstStyle/>
+          <a:p>
+            <a:pPr algn="ctr"/>
+          </a:p>
+        </p:txBody>
+      </p:sp>
+      <p:pic>
+        <p:nvPicPr>
+          <p:cNvPr id="21" name="Picture 20" descr="icon_70.png"/>
+          <p:cNvPicPr>
+            <a:picLocks noChangeAspect="1"/>
+          </p:cNvPicPr>
+          <p:nvPr/>
+        </p:nvPicPr>
+        <p:blipFill>
+          <a:blip r:embed="rId7"/>
+          <a:stretch>
+            <a:fillRect/>
+          </a:stretch>
+        </p:blipFill>
+        <p:spPr>
+          <a:xfrm>
+            <a:off x="6510528" y="3977640"/>
+            <a:ext cx="502920" cy="502920"/>
+          </a:xfrm>
+          <a:prstGeom prst="rect">
+            <a:avLst/>
+          </a:prstGeom>
+        </p:spPr>
+      </p:pic>
+      <p:sp>
+        <p:nvSpPr>
+          <p:cNvPr id="22" name="TextBox 21"/>
+          <p:cNvSpPr txBox="1"/>
+          <p:nvPr/>
+        </p:nvSpPr>
+        <p:spPr>
+          <a:xfrm>
+            <a:off x="7196328" y="4023360"/>
+            <a:ext cx="4114800" cy="457200"/>
+          </a:xfrm>
+          <a:prstGeom prst="rect">
+            <a:avLst/>
+          </a:prstGeom>
+          <a:noFill/>
+        </p:spPr>
+        <p:txBody>
+          <a:bodyPr wrap="square" anchor="ctr">
+            <a:spAutoFit/>
+          </a:bodyPr>
+          <a:lstStyle/>
+          <a:p>
+            <a:pPr algn="l"/>
+            <a:r>
+              <a:rPr sz="1400" b="1">
+                <a:solidFill>
+                  <a:srgbClr val="FFFFFF"/>
+                </a:solidFill>
+                <a:latin typeface="Verdana"/>
+                <a:ea typeface="Verdana"/>
+                <a:cs typeface="Verdana"/>
+              </a:rPr>
+              <a:t>Работа мобильного приложения</a:t>
+            </a:r>
+          </a:p>
+        </p:txBody>
+      </p:sp>
+      <p:sp>
+        <p:nvSpPr>
+          <p:cNvPr id="23" name="Rounded Rectangle 22"/>
+          <p:cNvSpPr/>
+          <p:nvPr/>
+        </p:nvSpPr>
+        <p:spPr>
+          <a:xfrm>
+            <a:off x="3607308" y="4846320"/>
+            <a:ext cx="5212080" cy="914400"/>
+          </a:xfrm>
+          <a:prstGeom prst="roundRect">
+            <a:avLst>
+              <a:gd name="adj" fmla="val 10000"/>
+            </a:avLst>
+          </a:prstGeom>
+          <a:solidFill>
+            <a:srgbClr val="3F3F3F"/>
+          </a:solidFill>
+          <a:ln>
+            <a:noFill/>
+          </a:ln>
+        </p:spPr>
+        <p:style>
+          <a:lnRef idx="1">
+            <a:schemeClr val="accent1"/>
+          </a:lnRef>
+          <a:fillRef idx="3">
+            <a:schemeClr val="accent1"/>
+          </a:fillRef>
+          <a:effectRef idx="2">
+            <a:schemeClr val="accent1"/>
+          </a:effectRef>
+          <a:fontRef idx="minor">
+            <a:schemeClr val="lt1"/>
+          </a:fontRef>
+        </p:style>
+        <p:txBody>
+          <a:bodyPr rtlCol="0" anchor="ctr"/>
+          <a:lstStyle/>
+          <a:p>
+            <a:pPr algn="ctr"/>
+          </a:p>
+        </p:txBody>
+      </p:sp>
+      <p:pic>
+        <p:nvPicPr>
+          <p:cNvPr id="24" name="Picture 23" descr="icon_27.png"/>
+          <p:cNvPicPr>
+            <a:picLocks noChangeAspect="1"/>
+          </p:cNvPicPr>
+          <p:nvPr/>
+        </p:nvPicPr>
+        <p:blipFill>
+          <a:blip r:embed="rId8"/>
+          <a:stretch>
+            <a:fillRect/>
+          </a:stretch>
+        </p:blipFill>
+        <p:spPr>
+          <a:xfrm>
+            <a:off x="3790188" y="5029200"/>
+            <a:ext cx="502920" cy="502920"/>
+          </a:xfrm>
+          <a:prstGeom prst="rect">
+            <a:avLst/>
+          </a:prstGeom>
+        </p:spPr>
+      </p:pic>
+      <p:sp>
+        <p:nvSpPr>
+          <p:cNvPr id="25" name="TextBox 24"/>
+          <p:cNvSpPr txBox="1"/>
+          <p:nvPr/>
+        </p:nvSpPr>
+        <p:spPr>
+          <a:xfrm>
+            <a:off x="4475988" y="5074920"/>
+            <a:ext cx="4114800" cy="457200"/>
+          </a:xfrm>
+          <a:prstGeom prst="rect">
+            <a:avLst/>
+          </a:prstGeom>
+          <a:noFill/>
+        </p:spPr>
+        <p:txBody>
+          <a:bodyPr wrap="square" anchor="ctr">
+            <a:spAutoFit/>
+          </a:bodyPr>
+          <a:lstStyle/>
+          <a:p>
+            <a:pPr algn="l"/>
+            <a:r>
+              <a:rPr sz="1400" b="1">
+                <a:solidFill>
+                  <a:srgbClr val="FFFFFF"/>
+                </a:solidFill>
+                <a:latin typeface="Verdana"/>
+                <a:ea typeface="Verdana"/>
+                <a:cs typeface="Verdana"/>
+              </a:rPr>
+              <a:t>Работа кадровика в 1С</a:t>
+            </a:r>
+          </a:p>
+        </p:txBody>
+      </p:sp>
+    </p:spTree>
+  </p:cSld>
+  <p:clrMapOvr>
+    <a:masterClrMapping/>
+  </p:clrMapOvr>
+</p:sld>
+</file>
+
+<file path=ppt/slides/slide17.xml><?xml version="1.0" encoding="utf-8"?>
 <p:sld xmlns:a="http://schemas.openxmlformats.org/drawingml/2006/main" xmlns:p="http://schemas.openxmlformats.org/presentationml/2006/main" xmlns:r="http://schemas.openxmlformats.org/officeDocument/2006/relationships">
   <p:cSld>
     <p:spTree>
@@ -16100,7 +17158,7 @@
       </p:sp>
       <p:pic>
         <p:nvPicPr>
-          <p:cNvPr id="45" name="Picture 44" descr="devices_full.png"/>
+          <p:cNvPr id="45" name="Picture 44" descr="mobile_home_salary.png"/>
           <p:cNvPicPr>
             <a:picLocks noChangeAspect="1"/>
           </p:cNvPicPr>
@@ -16114,8 +17172,32 @@
         </p:blipFill>
         <p:spPr>
           <a:xfrm>
-            <a:off x="7498079" y="1554480"/>
-            <a:ext cx="4023360" cy="2918408"/>
+            <a:off x="7452360" y="1508760"/>
+            <a:ext cx="2262842" cy="4434840"/>
+          </a:xfrm>
+          <a:prstGeom prst="rect">
+            <a:avLst/>
+          </a:prstGeom>
+        </p:spPr>
+      </p:pic>
+      <p:pic>
+        <p:nvPicPr>
+          <p:cNvPr id="46" name="Picture 45" descr="mobile_vacation_request.png"/>
+          <p:cNvPicPr>
+            <a:picLocks noChangeAspect="1"/>
+          </p:cNvPicPr>
+          <p:nvPr/>
+        </p:nvPicPr>
+        <p:blipFill>
+          <a:blip r:embed="rId3"/>
+          <a:stretch>
+            <a:fillRect/>
+          </a:stretch>
+        </p:blipFill>
+        <p:spPr>
+          <a:xfrm>
+            <a:off x="9646920" y="1508760"/>
+            <a:ext cx="2709537" cy="4434840"/>
           </a:xfrm>
           <a:prstGeom prst="rect">
             <a:avLst/>
@@ -16226,7 +17308,7 @@
       </p:sp>
       <p:pic>
         <p:nvPicPr>
-          <p:cNvPr id="5" name="Picture 4" descr="phone_mockup.png"/>
+          <p:cNvPr id="5" name="Picture 4" descr="mobile_home_salary.png"/>
           <p:cNvPicPr>
             <a:picLocks noChangeAspect="1"/>
           </p:cNvPicPr>
@@ -16240,8 +17322,8 @@
         </p:blipFill>
         <p:spPr>
           <a:xfrm>
-            <a:off x="777240" y="1554480"/>
-            <a:ext cx="2269598" cy="4114800"/>
+            <a:off x="868680" y="1508760"/>
+            <a:ext cx="2122872" cy="4160520"/>
           </a:xfrm>
           <a:prstGeom prst="rect">
             <a:avLst/>
